--- a/Unit-2-Ch-10/Ch10-Americas-Africa-Europe.pptx
+++ b/Unit-2-Ch-10/Ch10-Americas-Africa-Europe.pptx
@@ -4143,7 +4143,7 @@
                 <a:ea typeface="Calibri" pitchFamily="34" charset="-122"/>
                 <a:cs typeface="Calibri" pitchFamily="34" charset="-120"/>
               </a:rPr>
-              <a:t>Bactrian/dromedary: 500 lb capacity, weeks without water — the enabling technology of trans-Saharan commerce</a:t>
+              <a:t>Dromedary (one-humped): 500 lb capacity, weeks without water — the enabling technology of trans-Saharan commerce</a:t>
             </a:r>
             <a:endParaRPr lang="en-US" sz="1100" dirty="0"/>
           </a:p>
@@ -6868,7 +6868,7 @@
                 <a:ea typeface="Calibri" pitchFamily="34" charset="-122"/>
                 <a:cs typeface="Calibri" pitchFamily="34" charset="-120"/>
               </a:rPr>
-              <a:t>• Cahokia (near modern St. Louis): peak pop. 20,000–30,000 — larger than contemporary London</a:t>
+              <a:t>• Cahokia (near modern St. Louis): peak pop. 20,000–30,000 — comparable to many contemporary European cities (pop. est. 10,000–20,000)</a:t>
             </a:r>
             <a:endParaRPr lang="en-US" sz="1100" dirty="0"/>
           </a:p>
